--- a/presentation/UNanofabTools/flaskserver/slides/05-Admin-Panel.pptx
+++ b/presentation/UNanofabTools/flaskserver/slides/05-Admin-Panel.pptx
@@ -1129,7 +1129,7 @@
           <a:p>
             <a:r>
               <a:rPr lang="en-US" dirty="0"/>
-              <a:t>An important security principle, told simply. The page hides admin buttons from people who shouldn't see them — but that's just convenience, not protection, because a determined person could try the underlying action directly. So the server checks permission again on its own, every time. The general lesson, which recurs across the system: the front end is for friendliness; the server is for enforcement.</a:t>
+              <a:t>An important security principle, told simply. The page hides admin buttons from people who shouldn't see them — but that's just convenience, not protection, because a determined person could try the underlying action directly. So the server checks permission again on its own, every time. It also has two lockout guards: it won't delete or demote your own account, and it won't remove the last remaining admin — so nobody can accidentally lock everyone out of the panel. The general lesson, which recurs across the system: the front end is for friendliness; the server is for enforcement.</a:t>
             </a:r>
             <a:endParaRPr lang="en-US" dirty="0"/>
           </a:p>
@@ -4457,6 +4457,27 @@
                 <a:cs typeface="Calibri" pitchFamily="34" charset="-120"/>
               </a:rPr>
               <a:t>So the server independently re-checks permission on every action.</a:t>
+            </a:r>
+            <a:endParaRPr lang="en-US" sz="1500" dirty="0"/>
+          </a:p>
+          <a:p>
+            <a:pPr marL="228600" indent="-228600">
+              <a:spcAft>
+                <a:spcPts val="1000"/>
+              </a:spcAft>
+              <a:buSzPct val="100000"/>
+              <a:buChar char="•"/>
+            </a:pPr>
+            <a:r>
+              <a:rPr lang="en-US" sz="1500" dirty="0">
+                <a:solidFill>
+                  <a:srgbClr val="1A1A1A"/>
+                </a:solidFill>
+                <a:latin typeface="Calibri" pitchFamily="34" charset="0"/>
+                <a:ea typeface="Calibri" pitchFamily="34" charset="-122"/>
+                <a:cs typeface="Calibri" pitchFamily="34" charset="-120"/>
+              </a:rPr>
+              <a:t>It also refuses to let you delete your own account or the last admin — no accidental lockout.</a:t>
             </a:r>
             <a:endParaRPr lang="en-US" sz="1500" dirty="0"/>
           </a:p>
